--- a/pipeline/snapshots/missions/m_1776912339_4dd8e626/one_pager.pptx
+++ b/pipeline/snapshots/missions/m_1776912339_4dd8e626/one_pager.pptx
@@ -3316,6 +3316,121 @@
         </p:nvSpPr>
         <p:spPr>
           <a:xfrm>
+            <a:off x="457200" y="2606040"/>
+            <a:ext cx="2194560" cy="1005840"/>
+          </a:xfrm>
+          <a:prstGeom prst="rect">
+            <a:avLst/>
+          </a:prstGeom>
+          <a:solidFill>
+            <a:srgbClr val="FFFFFF"/>
+          </a:solidFill>
+          <a:ln w="9525">
+            <a:solidFill>
+              <a:srgbClr val="6B7280"/>
+            </a:solidFill>
+          </a:ln>
+        </p:spPr>
+        <p:style>
+          <a:lnRef idx="1">
+            <a:schemeClr val="accent1"/>
+          </a:lnRef>
+          <a:fillRef idx="3">
+            <a:schemeClr val="accent1"/>
+          </a:fillRef>
+          <a:effectRef idx="2">
+            <a:schemeClr val="accent1"/>
+          </a:effectRef>
+          <a:fontRef idx="minor">
+            <a:schemeClr val="lt1"/>
+          </a:fontRef>
+        </p:style>
+        <p:txBody>
+          <a:bodyPr rtlCol="0" anchor="ctr"/>
+          <a:lstStyle/>
+          <a:p>
+            <a:pPr algn="ctr"/>
+          </a:p>
+        </p:txBody>
+      </p:sp>
+      <p:sp>
+        <p:nvSpPr>
+          <p:cNvPr id="9" name="TextBox 8"/>
+          <p:cNvSpPr txBox="1"/>
+          <p:nvPr/>
+        </p:nvSpPr>
+        <p:spPr>
+          <a:xfrm>
+            <a:off x="594360" y="2697480"/>
+            <a:ext cx="1920240" cy="274320"/>
+          </a:xfrm>
+          <a:prstGeom prst="rect">
+            <a:avLst/>
+          </a:prstGeom>
+          <a:noFill/>
+        </p:spPr>
+        <p:txBody>
+          <a:bodyPr wrap="square" lIns="0" rIns="0" tIns="0" bIns="0">
+            <a:spAutoFit/>
+          </a:bodyPr>
+          <a:lstStyle/>
+          <a:p>
+            <a:pPr algn="l"/>
+            <a:r>
+              <a:rPr sz="800" b="1">
+                <a:solidFill>
+                  <a:srgbClr val="6B7280"/>
+                </a:solidFill>
+                <a:latin typeface="Calibri"/>
+              </a:rPr>
+              <a:t>DATA QUALITY.ROWS SCANNED</a:t>
+            </a:r>
+          </a:p>
+        </p:txBody>
+      </p:sp>
+      <p:sp>
+        <p:nvSpPr>
+          <p:cNvPr id="10" name="TextBox 9"/>
+          <p:cNvSpPr txBox="1"/>
+          <p:nvPr/>
+        </p:nvSpPr>
+        <p:spPr>
+          <a:xfrm>
+            <a:off x="594360" y="2971800"/>
+            <a:ext cx="1920240" cy="548640"/>
+          </a:xfrm>
+          <a:prstGeom prst="rect">
+            <a:avLst/>
+          </a:prstGeom>
+          <a:noFill/>
+        </p:spPr>
+        <p:txBody>
+          <a:bodyPr wrap="square" lIns="0" rIns="0" tIns="0" bIns="0">
+            <a:spAutoFit/>
+          </a:bodyPr>
+          <a:lstStyle/>
+          <a:p>
+            <a:pPr algn="l"/>
+            <a:r>
+              <a:rPr sz="2000" b="1">
+                <a:solidFill>
+                  <a:srgbClr val="1A1A1A"/>
+                </a:solidFill>
+                <a:latin typeface="Calibri"/>
+              </a:rPr>
+              <a:t>0.00</a:t>
+            </a:r>
+          </a:p>
+        </p:txBody>
+      </p:sp>
+      <p:sp>
+        <p:nvSpPr>
+          <p:cNvPr id="11" name="Rectangle 10"/>
+          <p:cNvSpPr/>
+          <p:nvPr/>
+        </p:nvSpPr>
+        <p:spPr>
+          <a:xfrm>
             <a:off x="457200" y="3794760"/>
             <a:ext cx="6858000" cy="3291840"/>
           </a:xfrm>
@@ -3355,7 +3470,7 @@
       </p:sp>
       <p:sp>
         <p:nvSpPr>
-          <p:cNvPr id="9" name="TextBox 8"/>
+          <p:cNvPr id="12" name="TextBox 11"/>
           <p:cNvSpPr txBox="1"/>
           <p:nvPr/>
         </p:nvSpPr>
@@ -3390,7 +3505,7 @@
       </p:sp>
       <p:sp>
         <p:nvSpPr>
-          <p:cNvPr id="10" name="TextBox 9"/>
+          <p:cNvPr id="13" name="TextBox 12"/>
           <p:cNvSpPr txBox="1"/>
           <p:nvPr/>
         </p:nvSpPr>
@@ -3418,14 +3533,14 @@
                 </a:solidFill>
                 <a:latin typeface="Calibri"/>
               </a:rPr>
-              <a:t>•  Which analyzers fired for each scope tag (green=ok, red=failed).</a:t>
-            </a:r>
-          </a:p>
-        </p:txBody>
-      </p:sp>
-      <p:sp>
-        <p:nvSpPr>
-          <p:cNvPr id="11" name="TextBox 10"/>
+              <a:t>•  Current value of each KPI tracked by this mission.</a:t>
+            </a:r>
+          </a:p>
+        </p:txBody>
+      </p:sp>
+      <p:sp>
+        <p:nvSpPr>
+          <p:cNvPr id="14" name="TextBox 13"/>
           <p:cNvSpPr txBox="1"/>
           <p:nvPr/>
         </p:nvSpPr>
@@ -3460,7 +3575,7 @@
       </p:sp>
       <p:sp>
         <p:nvSpPr>
-          <p:cNvPr id="12" name="TextBox 11"/>
+          <p:cNvPr id="15" name="TextBox 14"/>
           <p:cNvSpPr txBox="1"/>
           <p:nvPr/>
         </p:nvSpPr>
@@ -3495,7 +3610,7 @@
       </p:sp>
       <p:sp>
         <p:nvSpPr>
-          <p:cNvPr id="13" name="TextBox 12"/>
+          <p:cNvPr id="16" name="TextBox 15"/>
           <p:cNvSpPr txBox="1"/>
           <p:nvPr/>
         </p:nvSpPr>
@@ -3530,7 +3645,7 @@
       </p:sp>
       <p:sp>
         <p:nvSpPr>
-          <p:cNvPr id="14" name="TextBox 13"/>
+          <p:cNvPr id="17" name="TextBox 16"/>
           <p:cNvSpPr txBox="1"/>
           <p:nvPr/>
         </p:nvSpPr>
@@ -3558,14 +3673,14 @@
                 </a:solidFill>
                 <a:latin typeface="Calibri"/>
               </a:rPr>
-              <a:t>Refreshed: 2026-04-23 02:45:54 UTC</a:t>
-            </a:r>
-          </a:p>
-        </p:txBody>
-      </p:sp>
-      <p:sp>
-        <p:nvSpPr>
-          <p:cNvPr id="15" name="Rectangle 14"/>
+              <a:t>Refreshed: 2026-04-22 22:45:54 UTC</a:t>
+            </a:r>
+          </a:p>
+        </p:txBody>
+      </p:sp>
+      <p:sp>
+        <p:nvSpPr>
+          <p:cNvPr id="18" name="Rectangle 17"/>
           <p:cNvSpPr/>
           <p:nvPr/>
         </p:nvSpPr>
@@ -3610,7 +3725,7 @@
       </p:sp>
       <p:sp>
         <p:nvSpPr>
-          <p:cNvPr id="16" name="TextBox 15"/>
+          <p:cNvPr id="19" name="TextBox 18"/>
           <p:cNvSpPr txBox="1"/>
           <p:nvPr/>
         </p:nvSpPr>
